--- a/docs/free-rwe-resources/train-the-trainer/training/day-01-omop-cdm/kit/Participant-Workbook.pptx
+++ b/docs/free-rwe-resources/train-the-trainer/training/day-01-omop-cdm/kit/Participant-Workbook.pptx
@@ -10,6 +10,7 @@
     <p:sldId id="258" r:id="rId9"/>
     <p:sldId id="259" r:id="rId10"/>
     <p:sldId id="260" r:id="rId11"/>
+    <p:sldId id="261" r:id="rId12"/>
   </p:sldIdLst>
   <p:sldSz cx="12188952" cy="6858000" type="screen4x3"/>
   <p:notesSz cx="6858000" cy="9144000"/>
@@ -3107,7 +3108,7 @@
             <a:avLst/>
           </a:prstGeom>
           <a:solidFill>
-            <a:srgbClr val="4B2682"/>
+            <a:srgbClr val="20425A"/>
           </a:solidFill>
           <a:ln>
             <a:noFill/>
@@ -3150,7 +3151,7 @@
             <a:avLst/>
           </a:prstGeom>
           <a:solidFill>
-            <a:srgbClr val="7B4FA8"/>
+            <a:srgbClr val="904199"/>
           </a:solidFill>
           <a:ln>
             <a:noFill/>
@@ -3193,7 +3194,7 @@
             <a:avLst/>
           </a:prstGeom>
           <a:solidFill>
-            <a:srgbClr val="7B4FA8"/>
+            <a:srgbClr val="904199"/>
           </a:solidFill>
           <a:ln>
             <a:noFill/>
@@ -3236,7 +3237,7 @@
             <a:avLst/>
           </a:prstGeom>
           <a:solidFill>
-            <a:srgbClr val="7B4FA8"/>
+            <a:srgbClr val="904199"/>
           </a:solidFill>
           <a:ln>
             <a:noFill/>
@@ -3292,6 +3293,7 @@
                 <a:solidFill>
                   <a:srgbClr val="FFFFFF"/>
                 </a:solidFill>
+                <a:latin typeface="Gotham Narrow"/>
               </a:rPr>
               <a:t>DAY 1</a:t>
             </a:r>
@@ -3326,6 +3328,7 @@
                 <a:solidFill>
                   <a:srgbClr val="FFFFFF"/>
                 </a:solidFill>
+                <a:latin typeface="Gotham Narrow"/>
               </a:rPr>
               <a:t>OMOP Common Data Model
 and Standardized Vocabularies</a:t>
@@ -3359,8 +3362,9 @@
             <a:r>
               <a:rPr sz="2200" b="0" i="0">
                 <a:solidFill>
-                  <a:srgbClr val="C8B4E6"/>
+                  <a:srgbClr val="D9C4E6"/>
                 </a:solidFill>
+                <a:latin typeface="Arial"/>
               </a:rPr>
               <a:t>Participant Workbook</a:t>
             </a:r>
@@ -3393,8 +3397,9 @@
             <a:r>
               <a:rPr sz="1300" b="0" i="0">
                 <a:solidFill>
-                  <a:srgbClr val="AA96CD"/>
+                  <a:srgbClr val="AEC4D2"/>
                 </a:solidFill>
+                <a:latin typeface="Arial"/>
               </a:rPr>
               <a:t>ALS TDI · OHDSI/OMOP Train-the-Trainer</a:t>
             </a:r>
@@ -3434,7 +3439,7 @@
             <a:avLst/>
           </a:prstGeom>
           <a:solidFill>
-            <a:srgbClr val="4B2682"/>
+            <a:srgbClr val="20425A"/>
           </a:solidFill>
           <a:ln>
             <a:noFill/>
@@ -3470,14 +3475,14 @@
         </p:nvSpPr>
         <p:spPr>
           <a:xfrm>
-            <a:off x="0" y="923544"/>
-            <a:ext cx="12188952" cy="36576"/>
+            <a:off x="0" y="905256"/>
+            <a:ext cx="12188952" cy="54864"/>
           </a:xfrm>
           <a:prstGeom prst="rect">
             <a:avLst/>
           </a:prstGeom>
           <a:solidFill>
-            <a:srgbClr val="7B4FA8"/>
+            <a:srgbClr val="904199"/>
           </a:solidFill>
           <a:ln>
             <a:noFill/>
@@ -3533,6 +3538,7 @@
                 <a:solidFill>
                   <a:srgbClr val="FFFFFF"/>
                 </a:solidFill>
+                <a:latin typeface="Gotham Narrow"/>
               </a:rPr>
               <a:t>Learning Objectives</a:t>
             </a:r>
@@ -3567,6 +3573,7 @@
                 <a:solidFill>
                   <a:srgbClr val="5A5A5A"/>
                 </a:solidFill>
+                <a:latin typeface="Arial"/>
               </a:rPr>
               <a:t>By the end of this session, you will be able to:</a:t>
             </a:r>
@@ -3588,7 +3595,7 @@
             <a:avLst/>
           </a:prstGeom>
           <a:solidFill>
-            <a:srgbClr val="7B4FA8"/>
+            <a:srgbClr val="904199"/>
           </a:solidFill>
           <a:ln>
             <a:noFill/>
@@ -3644,6 +3651,7 @@
                 <a:solidFill>
                   <a:srgbClr val="FFFFFF"/>
                 </a:solidFill>
+                <a:latin typeface="Arial"/>
               </a:rPr>
               <a:t>1</a:t>
             </a:r>
@@ -3678,6 +3686,7 @@
                 <a:solidFill>
                   <a:srgbClr val="191919"/>
                 </a:solidFill>
+                <a:latin typeface="Arial"/>
               </a:rPr>
               <a:t>Explain the purpose of the OMOP CDM and its key design principles</a:t>
             </a:r>
@@ -3699,7 +3708,7 @@
             <a:avLst/>
           </a:prstGeom>
           <a:solidFill>
-            <a:srgbClr val="7B4FA8"/>
+            <a:srgbClr val="904199"/>
           </a:solidFill>
           <a:ln>
             <a:noFill/>
@@ -3755,6 +3764,7 @@
                 <a:solidFill>
                   <a:srgbClr val="FFFFFF"/>
                 </a:solidFill>
+                <a:latin typeface="Arial"/>
               </a:rPr>
               <a:t>2</a:t>
             </a:r>
@@ -3789,6 +3799,7 @@
                 <a:solidFill>
                   <a:srgbClr val="191919"/>
                 </a:solidFill>
+                <a:latin typeface="Arial"/>
               </a:rPr>
               <a:t>Identify and describe the core clinical and vocabulary tables</a:t>
             </a:r>
@@ -3810,7 +3821,7 @@
             <a:avLst/>
           </a:prstGeom>
           <a:solidFill>
-            <a:srgbClr val="7B4FA8"/>
+            <a:srgbClr val="904199"/>
           </a:solidFill>
           <a:ln>
             <a:noFill/>
@@ -3866,6 +3877,7 @@
                 <a:solidFill>
                   <a:srgbClr val="FFFFFF"/>
                 </a:solidFill>
+                <a:latin typeface="Arial"/>
               </a:rPr>
               <a:t>3</a:t>
             </a:r>
@@ -3900,6 +3912,7 @@
                 <a:solidFill>
                   <a:srgbClr val="191919"/>
                 </a:solidFill>
+                <a:latin typeface="Arial"/>
               </a:rPr>
               <a:t>Distinguish between standard and non-standard concepts</a:t>
             </a:r>
@@ -3921,7 +3934,7 @@
             <a:avLst/>
           </a:prstGeom>
           <a:solidFill>
-            <a:srgbClr val="7B4FA8"/>
+            <a:srgbClr val="904199"/>
           </a:solidFill>
           <a:ln>
             <a:noFill/>
@@ -3977,6 +3990,7 @@
                 <a:solidFill>
                   <a:srgbClr val="FFFFFF"/>
                 </a:solidFill>
+                <a:latin typeface="Arial"/>
               </a:rPr>
               <a:t>4</a:t>
             </a:r>
@@ -4011,6 +4025,7 @@
                 <a:solidFill>
                   <a:srgbClr val="191919"/>
                 </a:solidFill>
+                <a:latin typeface="Arial"/>
               </a:rPr>
               <a:t>Navigate Athena to find concepts, relationships, and hierarchies</a:t>
             </a:r>
@@ -4032,7 +4047,7 @@
             <a:avLst/>
           </a:prstGeom>
           <a:solidFill>
-            <a:srgbClr val="7B4FA8"/>
+            <a:srgbClr val="904199"/>
           </a:solidFill>
           <a:ln>
             <a:noFill/>
@@ -4088,6 +4103,7 @@
                 <a:solidFill>
                   <a:srgbClr val="FFFFFF"/>
                 </a:solidFill>
+                <a:latin typeface="Arial"/>
               </a:rPr>
               <a:t>5</a:t>
             </a:r>
@@ -4122,6 +4138,7 @@
                 <a:solidFill>
                   <a:srgbClr val="191919"/>
                 </a:solidFill>
+                <a:latin typeface="Arial"/>
               </a:rPr>
               <a:t>Write basic SQL queries to explore OMOP CDM data</a:t>
             </a:r>
@@ -4161,7 +4178,7 @@
             <a:avLst/>
           </a:prstGeom>
           <a:solidFill>
-            <a:srgbClr val="4B2682"/>
+            <a:srgbClr val="20425A"/>
           </a:solidFill>
           <a:ln>
             <a:noFill/>
@@ -4197,14 +4214,14 @@
         </p:nvSpPr>
         <p:spPr>
           <a:xfrm>
-            <a:off x="0" y="923544"/>
-            <a:ext cx="12188952" cy="36576"/>
+            <a:off x="0" y="905256"/>
+            <a:ext cx="12188952" cy="54864"/>
           </a:xfrm>
           <a:prstGeom prst="rect">
             <a:avLst/>
           </a:prstGeom>
           <a:solidFill>
-            <a:srgbClr val="7B4FA8"/>
+            <a:srgbClr val="904199"/>
           </a:solidFill>
           <a:ln>
             <a:noFill/>
@@ -4260,6 +4277,7 @@
                 <a:solidFill>
                   <a:srgbClr val="FFFFFF"/>
                 </a:solidFill>
+                <a:latin typeface="Gotham Narrow"/>
               </a:rPr>
               <a:t>Core Clinical Tables — Fill In the Description</a:t>
             </a:r>
@@ -4299,6 +4317,7 @@
                           <a:solidFill>
                             <a:srgbClr val="FFFFFF"/>
                           </a:solidFill>
+                          <a:latin typeface="Gotham Narrow"/>
                         </a:rPr>
                         <a:t>Table</a:t>
                       </a:r>
@@ -4306,7 +4325,7 @@
                   </a:txBody>
                   <a:tcPr>
                     <a:solidFill>
-                      <a:srgbClr val="4B2682"/>
+                      <a:srgbClr val="20425A"/>
                     </a:solidFill>
                   </a:tcPr>
                 </a:tc>
@@ -4320,6 +4339,7 @@
                           <a:solidFill>
                             <a:srgbClr val="FFFFFF"/>
                           </a:solidFill>
+                          <a:latin typeface="Gotham Narrow"/>
                         </a:rPr>
                         <a:t>What It Contains (fill in)</a:t>
                       </a:r>
@@ -4327,7 +4347,7 @@
                   </a:txBody>
                   <a:tcPr>
                     <a:solidFill>
-                      <a:srgbClr val="4B2682"/>
+                      <a:srgbClr val="20425A"/>
                     </a:solidFill>
                   </a:tcPr>
                 </a:tc>
@@ -4343,6 +4363,7 @@
                           <a:solidFill>
                             <a:srgbClr val="191919"/>
                           </a:solidFill>
+                          <a:latin typeface="Arial"/>
                         </a:rPr>
                         <a:t>person</a:t>
                       </a:r>
@@ -4364,6 +4385,7 @@
                           <a:solidFill>
                             <a:srgbClr val="191919"/>
                           </a:solidFill>
+                          <a:latin typeface="Arial"/>
                         </a:rPr>
                         <a:t/>
                       </a:r>
@@ -4387,6 +4409,7 @@
                           <a:solidFill>
                             <a:srgbClr val="191919"/>
                           </a:solidFill>
+                          <a:latin typeface="Arial"/>
                         </a:rPr>
                         <a:t>visit_occurrence</a:t>
                       </a:r>
@@ -4408,6 +4431,7 @@
                           <a:solidFill>
                             <a:srgbClr val="191919"/>
                           </a:solidFill>
+                          <a:latin typeface="Arial"/>
                         </a:rPr>
                         <a:t/>
                       </a:r>
@@ -4431,6 +4455,7 @@
                           <a:solidFill>
                             <a:srgbClr val="191919"/>
                           </a:solidFill>
+                          <a:latin typeface="Arial"/>
                         </a:rPr>
                         <a:t>condition_occurrence</a:t>
                       </a:r>
@@ -4452,6 +4477,7 @@
                           <a:solidFill>
                             <a:srgbClr val="191919"/>
                           </a:solidFill>
+                          <a:latin typeface="Arial"/>
                         </a:rPr>
                         <a:t/>
                       </a:r>
@@ -4475,6 +4501,7 @@
                           <a:solidFill>
                             <a:srgbClr val="191919"/>
                           </a:solidFill>
+                          <a:latin typeface="Arial"/>
                         </a:rPr>
                         <a:t>drug_exposure</a:t>
                       </a:r>
@@ -4496,6 +4523,7 @@
                           <a:solidFill>
                             <a:srgbClr val="191919"/>
                           </a:solidFill>
+                          <a:latin typeface="Arial"/>
                         </a:rPr>
                         <a:t/>
                       </a:r>
@@ -4519,6 +4547,7 @@
                           <a:solidFill>
                             <a:srgbClr val="191919"/>
                           </a:solidFill>
+                          <a:latin typeface="Arial"/>
                         </a:rPr>
                         <a:t>measurement</a:t>
                       </a:r>
@@ -4540,6 +4569,7 @@
                           <a:solidFill>
                             <a:srgbClr val="191919"/>
                           </a:solidFill>
+                          <a:latin typeface="Arial"/>
                         </a:rPr>
                         <a:t/>
                       </a:r>
@@ -4563,6 +4593,7 @@
                           <a:solidFill>
                             <a:srgbClr val="191919"/>
                           </a:solidFill>
+                          <a:latin typeface="Arial"/>
                         </a:rPr>
                         <a:t>procedure_occurrence</a:t>
                       </a:r>
@@ -4584,6 +4615,7 @@
                           <a:solidFill>
                             <a:srgbClr val="191919"/>
                           </a:solidFill>
+                          <a:latin typeface="Arial"/>
                         </a:rPr>
                         <a:t/>
                       </a:r>
@@ -4607,6 +4639,7 @@
                           <a:solidFill>
                             <a:srgbClr val="191919"/>
                           </a:solidFill>
+                          <a:latin typeface="Arial"/>
                         </a:rPr>
                         <a:t>observation</a:t>
                       </a:r>
@@ -4628,6 +4661,7 @@
                           <a:solidFill>
                             <a:srgbClr val="191919"/>
                           </a:solidFill>
+                          <a:latin typeface="Arial"/>
                         </a:rPr>
                         <a:t/>
                       </a:r>
@@ -4651,6 +4685,7 @@
                           <a:solidFill>
                             <a:srgbClr val="191919"/>
                           </a:solidFill>
+                          <a:latin typeface="Arial"/>
                         </a:rPr>
                         <a:t>death</a:t>
                       </a:r>
@@ -4672,6 +4707,7 @@
                           <a:solidFill>
                             <a:srgbClr val="191919"/>
                           </a:solidFill>
+                          <a:latin typeface="Arial"/>
                         </a:rPr>
                         <a:t/>
                       </a:r>
@@ -4721,7 +4757,7 @@
             <a:avLst/>
           </a:prstGeom>
           <a:solidFill>
-            <a:srgbClr val="4B2682"/>
+            <a:srgbClr val="20425A"/>
           </a:solidFill>
           <a:ln>
             <a:noFill/>
@@ -4757,14 +4793,14 @@
         </p:nvSpPr>
         <p:spPr>
           <a:xfrm>
-            <a:off x="0" y="923544"/>
-            <a:ext cx="12188952" cy="36576"/>
+            <a:off x="0" y="905256"/>
+            <a:ext cx="12188952" cy="54864"/>
           </a:xfrm>
           <a:prstGeom prst="rect">
             <a:avLst/>
           </a:prstGeom>
           <a:solidFill>
-            <a:srgbClr val="7B4FA8"/>
+            <a:srgbClr val="904199"/>
           </a:solidFill>
           <a:ln>
             <a:noFill/>
@@ -4820,6 +4856,7 @@
                 <a:solidFill>
                   <a:srgbClr val="FFFFFF"/>
                 </a:solidFill>
+                <a:latin typeface="Gotham Narrow"/>
               </a:rPr>
               <a:t>Standard vs Non-Standard Concepts — Key Points</a:t>
             </a:r>
@@ -4858,6 +4895,7 @@
                 <a:solidFill>
                   <a:srgbClr val="191919"/>
                 </a:solidFill>
+                <a:latin typeface="Arial"/>
               </a:rPr>
               <a:t>Standard concept: standard_concept = '___'  (fill in)</a:t>
             </a:r>
@@ -4873,6 +4911,7 @@
                 <a:solidFill>
                   <a:srgbClr val="191919"/>
                 </a:solidFill>
+                <a:latin typeface="Arial"/>
               </a:rPr>
               <a:t>Non-standard concept: standard_concept = _____ (fill in)</a:t>
             </a:r>
@@ -4888,6 +4927,7 @@
                 <a:solidFill>
                   <a:srgbClr val="191919"/>
                 </a:solidFill>
+                <a:latin typeface="Arial"/>
               </a:rPr>
               <a:t>Which table stores the standard concept for a condition? _______________</a:t>
             </a:r>
@@ -4903,6 +4943,7 @@
                 <a:solidFill>
                   <a:srgbClr val="191919"/>
                 </a:solidFill>
+                <a:latin typeface="Arial"/>
               </a:rPr>
               <a:t>Which relationship links an ICD code to its standard SNOMED concept? _______________</a:t>
             </a:r>
@@ -4918,6 +4959,7 @@
                 <a:solidFill>
                   <a:srgbClr val="191919"/>
                 </a:solidFill>
+                <a:latin typeface="Arial"/>
               </a:rPr>
               <a:t>If condition_concept_id = 0, this means: ____________________________</a:t>
             </a:r>
@@ -4933,6 +4975,7 @@
                 <a:solidFill>
                   <a:srgbClr val="191919"/>
                 </a:solidFill>
+                <a:latin typeface="Arial"/>
               </a:rPr>
               <a:t>Can you build a concept set on an ICD-10-CM code? ___________________</a:t>
             </a:r>
@@ -4972,7 +5015,7 @@
             <a:avLst/>
           </a:prstGeom>
           <a:solidFill>
-            <a:srgbClr val="4B2682"/>
+            <a:srgbClr val="20425A"/>
           </a:solidFill>
           <a:ln>
             <a:noFill/>
@@ -5008,14 +5051,14 @@
         </p:nvSpPr>
         <p:spPr>
           <a:xfrm>
-            <a:off x="0" y="923544"/>
-            <a:ext cx="12188952" cy="36576"/>
+            <a:off x="0" y="905256"/>
+            <a:ext cx="12188952" cy="54864"/>
           </a:xfrm>
           <a:prstGeom prst="rect">
             <a:avLst/>
           </a:prstGeom>
           <a:solidFill>
-            <a:srgbClr val="7B4FA8"/>
+            <a:srgbClr val="904199"/>
           </a:solidFill>
           <a:ln>
             <a:noFill/>
@@ -5071,6 +5114,7 @@
                 <a:solidFill>
                   <a:srgbClr val="FFFFFF"/>
                 </a:solidFill>
+                <a:latin typeface="Gotham Narrow"/>
               </a:rPr>
               <a:t>Athena Exercise — Record Your Findings</a:t>
             </a:r>
@@ -5109,6 +5153,7 @@
                 <a:solidFill>
                   <a:srgbClr val="191919"/>
                 </a:solidFill>
+                <a:latin typeface="Arial"/>
               </a:rPr>
               <a:t>Condition I searched for: _________________________________________</a:t>
             </a:r>
@@ -5124,6 +5169,7 @@
                 <a:solidFill>
                   <a:srgbClr val="191919"/>
                 </a:solidFill>
+                <a:latin typeface="Arial"/>
               </a:rPr>
               <a:t>Standard concept name: ___________________________________________</a:t>
             </a:r>
@@ -5139,6 +5185,7 @@
                 <a:solidFill>
                   <a:srgbClr val="191919"/>
                 </a:solidFill>
+                <a:latin typeface="Arial"/>
               </a:rPr>
               <a:t>Standard concept_id: _____________________________________________</a:t>
             </a:r>
@@ -5154,6 +5201,7 @@
                 <a:solidFill>
                   <a:srgbClr val="191919"/>
                 </a:solidFill>
+                <a:latin typeface="Arial"/>
               </a:rPr>
               <a:t>Vocabulary_id of the standard concept: ____________________________</a:t>
             </a:r>
@@ -5169,6 +5217,7 @@
                 <a:solidFill>
                   <a:srgbClr val="191919"/>
                 </a:solidFill>
+                <a:latin typeface="Arial"/>
               </a:rPr>
               <a:t>Number of ICD codes that 'Map to' this concept: ___________________</a:t>
             </a:r>
@@ -5184,6 +5233,7 @@
                 <a:solidFill>
                   <a:srgbClr val="191919"/>
                 </a:solidFill>
+                <a:latin typeface="Arial"/>
               </a:rPr>
               <a:t>Number of descendant concepts: ____________________________________</a:t>
             </a:r>
@@ -5199,8 +5249,296 @@
                 <a:solidFill>
                   <a:srgbClr val="191919"/>
                 </a:solidFill>
+                <a:latin typeface="Arial"/>
               </a:rPr>
               <a:t>One surprising concept I found in the hierarchy: ____________________</a:t>
+            </a:r>
+          </a:p>
+        </p:txBody>
+      </p:sp>
+    </p:spTree>
+  </p:cSld>
+  <p:clrMapOvr>
+    <a:masterClrMapping/>
+  </p:clrMapOvr>
+</p:sld>
+</file>
+
+<file path=ppt/slides/slide6.xml><?xml version="1.0" encoding="utf-8"?>
+<p:sld xmlns:a="http://schemas.openxmlformats.org/drawingml/2006/main" xmlns:p="http://schemas.openxmlformats.org/presentationml/2006/main" xmlns:r="http://schemas.openxmlformats.org/officeDocument/2006/relationships">
+  <p:cSld>
+    <p:spTree>
+      <p:nvGrpSpPr>
+        <p:cNvPr id="1" name=""/>
+        <p:cNvGrpSpPr/>
+        <p:nvPr/>
+      </p:nvGrpSpPr>
+      <p:grpSpPr/>
+      <p:sp>
+        <p:nvSpPr>
+          <p:cNvPr id="2" name="Rectangle 1"/>
+          <p:cNvSpPr/>
+          <p:nvPr/>
+        </p:nvSpPr>
+        <p:spPr>
+          <a:xfrm>
+            <a:off x="0" y="0"/>
+            <a:ext cx="12188952" cy="6858000"/>
+          </a:xfrm>
+          <a:prstGeom prst="rect">
+            <a:avLst/>
+          </a:prstGeom>
+          <a:solidFill>
+            <a:srgbClr val="20425A"/>
+          </a:solidFill>
+          <a:ln>
+            <a:noFill/>
+          </a:ln>
+        </p:spPr>
+        <p:style>
+          <a:lnRef idx="1">
+            <a:schemeClr val="accent1"/>
+          </a:lnRef>
+          <a:fillRef idx="3">
+            <a:schemeClr val="accent1"/>
+          </a:fillRef>
+          <a:effectRef idx="2">
+            <a:schemeClr val="accent1"/>
+          </a:effectRef>
+          <a:fontRef idx="minor">
+            <a:schemeClr val="lt1"/>
+          </a:fontRef>
+        </p:style>
+        <p:txBody>
+          <a:bodyPr rtlCol="0" anchor="ctr"/>
+          <a:lstStyle/>
+          <a:p>
+            <a:pPr algn="ctr"/>
+          </a:p>
+        </p:txBody>
+      </p:sp>
+      <p:sp>
+        <p:nvSpPr>
+          <p:cNvPr id="3" name="Rectangle 2"/>
+          <p:cNvSpPr/>
+          <p:nvPr/>
+        </p:nvSpPr>
+        <p:spPr>
+          <a:xfrm>
+            <a:off x="0" y="0"/>
+            <a:ext cx="12188952" cy="64008"/>
+          </a:xfrm>
+          <a:prstGeom prst="rect">
+            <a:avLst/>
+          </a:prstGeom>
+          <a:solidFill>
+            <a:srgbClr val="904199"/>
+          </a:solidFill>
+          <a:ln>
+            <a:noFill/>
+          </a:ln>
+        </p:spPr>
+        <p:style>
+          <a:lnRef idx="1">
+            <a:schemeClr val="accent1"/>
+          </a:lnRef>
+          <a:fillRef idx="3">
+            <a:schemeClr val="accent1"/>
+          </a:fillRef>
+          <a:effectRef idx="2">
+            <a:schemeClr val="accent1"/>
+          </a:effectRef>
+          <a:fontRef idx="minor">
+            <a:schemeClr val="lt1"/>
+          </a:fontRef>
+        </p:style>
+        <p:txBody>
+          <a:bodyPr rtlCol="0" anchor="ctr"/>
+          <a:lstStyle/>
+          <a:p>
+            <a:pPr algn="ctr"/>
+          </a:p>
+        </p:txBody>
+      </p:sp>
+      <p:sp>
+        <p:nvSpPr>
+          <p:cNvPr id="4" name="Rectangle 3"/>
+          <p:cNvSpPr/>
+          <p:nvPr/>
+        </p:nvSpPr>
+        <p:spPr>
+          <a:xfrm>
+            <a:off x="0" y="6793992"/>
+            <a:ext cx="12188952" cy="64008"/>
+          </a:xfrm>
+          <a:prstGeom prst="rect">
+            <a:avLst/>
+          </a:prstGeom>
+          <a:solidFill>
+            <a:srgbClr val="904199"/>
+          </a:solidFill>
+          <a:ln>
+            <a:noFill/>
+          </a:ln>
+        </p:spPr>
+        <p:style>
+          <a:lnRef idx="1">
+            <a:schemeClr val="accent1"/>
+          </a:lnRef>
+          <a:fillRef idx="3">
+            <a:schemeClr val="accent1"/>
+          </a:fillRef>
+          <a:effectRef idx="2">
+            <a:schemeClr val="accent1"/>
+          </a:effectRef>
+          <a:fontRef idx="minor">
+            <a:schemeClr val="lt1"/>
+          </a:fontRef>
+        </p:style>
+        <p:txBody>
+          <a:bodyPr rtlCol="0" anchor="ctr"/>
+          <a:lstStyle/>
+          <a:p>
+            <a:pPr algn="ctr"/>
+          </a:p>
+        </p:txBody>
+      </p:sp>
+      <p:sp>
+        <p:nvSpPr>
+          <p:cNvPr id="5" name="TextBox 4"/>
+          <p:cNvSpPr txBox="1"/>
+          <p:nvPr/>
+        </p:nvSpPr>
+        <p:spPr>
+          <a:xfrm>
+            <a:off x="475488" y="1828800"/>
+            <a:ext cx="11237976" cy="1188720"/>
+          </a:xfrm>
+          <a:prstGeom prst="rect">
+            <a:avLst/>
+          </a:prstGeom>
+          <a:noFill/>
+        </p:spPr>
+        <p:txBody>
+          <a:bodyPr wrap="square">
+            <a:spAutoFit/>
+          </a:bodyPr>
+          <a:lstStyle/>
+          <a:p>
+            <a:pPr algn="l"/>
+            <a:r>
+              <a:rPr sz="4400" b="1" i="0">
+                <a:solidFill>
+                  <a:srgbClr val="FFFFFF"/>
+                </a:solidFill>
+                <a:latin typeface="Gotham Narrow"/>
+              </a:rPr>
+              <a:t>Thank You.  Questions?</a:t>
+            </a:r>
+          </a:p>
+        </p:txBody>
+      </p:sp>
+      <p:sp>
+        <p:nvSpPr>
+          <p:cNvPr id="6" name="TextBox 5"/>
+          <p:cNvSpPr txBox="1"/>
+          <p:nvPr/>
+        </p:nvSpPr>
+        <p:spPr>
+          <a:xfrm>
+            <a:off x="475488" y="3383280"/>
+            <a:ext cx="11237976" cy="640080"/>
+          </a:xfrm>
+          <a:prstGeom prst="rect">
+            <a:avLst/>
+          </a:prstGeom>
+          <a:noFill/>
+        </p:spPr>
+        <p:txBody>
+          <a:bodyPr wrap="square">
+            <a:spAutoFit/>
+          </a:bodyPr>
+          <a:lstStyle/>
+          <a:p>
+            <a:pPr algn="l"/>
+            <a:r>
+              <a:rPr sz="2400" b="0" i="0">
+                <a:solidFill>
+                  <a:srgbClr val="FFFFFF"/>
+                </a:solidFill>
+                <a:latin typeface="Arial"/>
+              </a:rPr>
+              <a:t>Danielle Boyce</a:t>
+            </a:r>
+          </a:p>
+        </p:txBody>
+      </p:sp>
+      <p:sp>
+        <p:nvSpPr>
+          <p:cNvPr id="7" name="TextBox 6"/>
+          <p:cNvSpPr txBox="1"/>
+          <p:nvPr/>
+        </p:nvSpPr>
+        <p:spPr>
+          <a:xfrm>
+            <a:off x="475488" y="3977639"/>
+            <a:ext cx="11237976" cy="640080"/>
+          </a:xfrm>
+          <a:prstGeom prst="rect">
+            <a:avLst/>
+          </a:prstGeom>
+          <a:noFill/>
+        </p:spPr>
+        <p:txBody>
+          <a:bodyPr wrap="square">
+            <a:spAutoFit/>
+          </a:bodyPr>
+          <a:lstStyle/>
+          <a:p>
+            <a:pPr algn="l"/>
+            <a:r>
+              <a:rPr sz="2200" b="0" i="0">
+                <a:solidFill>
+                  <a:srgbClr val="D9C4E6"/>
+                </a:solidFill>
+                <a:latin typeface="Arial"/>
+              </a:rPr>
+              <a:t>dboyce@als.net</a:t>
+            </a:r>
+          </a:p>
+        </p:txBody>
+      </p:sp>
+      <p:sp>
+        <p:nvSpPr>
+          <p:cNvPr id="8" name="TextBox 7"/>
+          <p:cNvSpPr txBox="1"/>
+          <p:nvPr/>
+        </p:nvSpPr>
+        <p:spPr>
+          <a:xfrm>
+            <a:off x="475488" y="6309360"/>
+            <a:ext cx="8229600" cy="365760"/>
+          </a:xfrm>
+          <a:prstGeom prst="rect">
+            <a:avLst/>
+          </a:prstGeom>
+          <a:noFill/>
+        </p:spPr>
+        <p:txBody>
+          <a:bodyPr wrap="square">
+            <a:spAutoFit/>
+          </a:bodyPr>
+          <a:lstStyle/>
+          <a:p>
+            <a:pPr algn="l"/>
+            <a:r>
+              <a:rPr sz="1300" b="0" i="0">
+                <a:solidFill>
+                  <a:srgbClr val="AEC4D2"/>
+                </a:solidFill>
+                <a:latin typeface="Arial"/>
+              </a:rPr>
+              <a:t>ALS TDI · OHDSI/OMOP Train-the-Trainer</a:t>
             </a:r>
           </a:p>
         </p:txBody>
